--- a/Weekly Reports/slides/2-alexis-perez.pptx
+++ b/Weekly Reports/slides/2-alexis-perez.pptx
@@ -5,7 +5,9 @@
     <p:sldMasterId id="2147483648" r:id="rId1"/>
   </p:sldMasterIdLst>
   <p:sldIdLst>
-    <p:sldId id="258" r:id="rId4"/>
+    <p:sldId id="258" r:id="rId2"/>
+    <p:sldId id="259" r:id="rId3"/>
+    <p:sldId id="260" r:id="rId4"/>
   </p:sldIdLst>
   <p:sldSz cx="12192000" cy="6858000"/>
   <p:notesSz cx="6858000" cy="9144000"/>
@@ -259,7 +261,7 @@
           <a:p>
             <a:fld id="{752E6B35-DAD5-CF47-9E65-9CA12B499D8C}" type="datetimeFigureOut">
               <a:rPr lang="en-US" smtClean="0"/>
-              <a:t>9/14/2026</a:t>
+              <a:t>9/21/2026</a:t>
             </a:fld>
             <a:endParaRPr lang="en-US"/>
           </a:p>
@@ -457,7 +459,7 @@
           <a:p>
             <a:fld id="{752E6B35-DAD5-CF47-9E65-9CA12B499D8C}" type="datetimeFigureOut">
               <a:rPr lang="en-US" smtClean="0"/>
-              <a:t>9/14/2026</a:t>
+              <a:t>9/21/2026</a:t>
             </a:fld>
             <a:endParaRPr lang="en-US"/>
           </a:p>
@@ -665,7 +667,7 @@
           <a:p>
             <a:fld id="{752E6B35-DAD5-CF47-9E65-9CA12B499D8C}" type="datetimeFigureOut">
               <a:rPr lang="en-US" smtClean="0"/>
-              <a:t>9/14/2026</a:t>
+              <a:t>9/21/2026</a:t>
             </a:fld>
             <a:endParaRPr lang="en-US"/>
           </a:p>
@@ -863,7 +865,7 @@
           <a:p>
             <a:fld id="{752E6B35-DAD5-CF47-9E65-9CA12B499D8C}" type="datetimeFigureOut">
               <a:rPr lang="en-US" smtClean="0"/>
-              <a:t>9/14/2026</a:t>
+              <a:t>9/21/2026</a:t>
             </a:fld>
             <a:endParaRPr lang="en-US"/>
           </a:p>
@@ -1138,7 +1140,7 @@
           <a:p>
             <a:fld id="{752E6B35-DAD5-CF47-9E65-9CA12B499D8C}" type="datetimeFigureOut">
               <a:rPr lang="en-US" smtClean="0"/>
-              <a:t>9/14/2026</a:t>
+              <a:t>9/21/2026</a:t>
             </a:fld>
             <a:endParaRPr lang="en-US"/>
           </a:p>
@@ -1403,7 +1405,7 @@
           <a:p>
             <a:fld id="{752E6B35-DAD5-CF47-9E65-9CA12B499D8C}" type="datetimeFigureOut">
               <a:rPr lang="en-US" smtClean="0"/>
-              <a:t>9/14/2026</a:t>
+              <a:t>9/21/2026</a:t>
             </a:fld>
             <a:endParaRPr lang="en-US"/>
           </a:p>
@@ -1815,7 +1817,7 @@
           <a:p>
             <a:fld id="{752E6B35-DAD5-CF47-9E65-9CA12B499D8C}" type="datetimeFigureOut">
               <a:rPr lang="en-US" smtClean="0"/>
-              <a:t>9/14/2026</a:t>
+              <a:t>9/21/2026</a:t>
             </a:fld>
             <a:endParaRPr lang="en-US"/>
           </a:p>
@@ -1956,7 +1958,7 @@
           <a:p>
             <a:fld id="{752E6B35-DAD5-CF47-9E65-9CA12B499D8C}" type="datetimeFigureOut">
               <a:rPr lang="en-US" smtClean="0"/>
-              <a:t>9/14/2026</a:t>
+              <a:t>9/21/2026</a:t>
             </a:fld>
             <a:endParaRPr lang="en-US"/>
           </a:p>
@@ -2069,7 +2071,7 @@
           <a:p>
             <a:fld id="{752E6B35-DAD5-CF47-9E65-9CA12B499D8C}" type="datetimeFigureOut">
               <a:rPr lang="en-US" smtClean="0"/>
-              <a:t>9/14/2026</a:t>
+              <a:t>9/21/2026</a:t>
             </a:fld>
             <a:endParaRPr lang="en-US"/>
           </a:p>
@@ -2380,7 +2382,7 @@
           <a:p>
             <a:fld id="{752E6B35-DAD5-CF47-9E65-9CA12B499D8C}" type="datetimeFigureOut">
               <a:rPr lang="en-US" smtClean="0"/>
-              <a:t>9/14/2026</a:t>
+              <a:t>9/21/2026</a:t>
             </a:fld>
             <a:endParaRPr lang="en-US"/>
           </a:p>
@@ -2668,7 +2670,7 @@
           <a:p>
             <a:fld id="{752E6B35-DAD5-CF47-9E65-9CA12B499D8C}" type="datetimeFigureOut">
               <a:rPr lang="en-US" smtClean="0"/>
-              <a:t>9/14/2026</a:t>
+              <a:t>9/21/2026</a:t>
             </a:fld>
             <a:endParaRPr lang="en-US"/>
           </a:p>
@@ -2909,7 +2911,7 @@
           <a:p>
             <a:fld id="{752E6B35-DAD5-CF47-9E65-9CA12B499D8C}" type="datetimeFigureOut">
               <a:rPr lang="en-US" smtClean="0"/>
-              <a:t>9/14/2026</a:t>
+              <a:t>9/21/2026</a:t>
             </a:fld>
             <a:endParaRPr lang="en-US"/>
           </a:p>
@@ -3309,7 +3311,7 @@
 </p:sldMaster>
 </file>
 
-<file path=ppt/slides/slide3.xml><?xml version="1.0" encoding="utf-8"?>
+<file path=ppt/slides/slide1.xml><?xml version="1.0" encoding="utf-8"?>
 <p:sld xmlns:a="http://schemas.openxmlformats.org/drawingml/2006/main" xmlns:r="http://schemas.openxmlformats.org/officeDocument/2006/relationships" xmlns:p="http://schemas.openxmlformats.org/presentationml/2006/main">
   <p:cSld>
     <p:spTree>
@@ -3373,7 +3375,7 @@
         <p:spPr/>
         <p:txBody>
           <a:bodyPr>
-            <a:normAutofit lnSpcReduction="10000"/>
+            <a:normAutofit fontScale="85000" lnSpcReduction="20000"/>
           </a:bodyPr>
           <a:lstStyle/>
           <a:p>
@@ -3386,14 +3388,21 @@
             <a:pPr lvl="1"/>
             <a:r>
               <a:rPr lang="en-US" dirty="0"/>
-              <a:t>Test Ultrasonic Sensor for Distance, Accuracy, and operational range</a:t>
+              <a:t>Implement ultrasonic sensor onto Raspberry Pi </a:t>
             </a:r>
           </a:p>
           <a:p>
             <a:pPr lvl="1"/>
             <a:r>
               <a:rPr lang="en-US" dirty="0"/>
-              <a:t>Research Motor options for Vehicle</a:t>
+              <a:t>Test motors and motor controller </a:t>
+            </a:r>
+          </a:p>
+          <a:p>
+            <a:pPr lvl="1"/>
+            <a:r>
+              <a:rPr lang="en-US" dirty="0"/>
+              <a:t>Research battery/power supply options</a:t>
             </a:r>
           </a:p>
           <a:p>
@@ -3406,14 +3415,21 @@
             <a:pPr lvl="1"/>
             <a:r>
               <a:rPr lang="en-US" dirty="0"/>
-              <a:t>Tested Ultrasonic Sensor’s distance readings and measurement accuracy</a:t>
+              <a:t>Finalized ultrasonic sensor implementation on Raspberry Pi </a:t>
             </a:r>
           </a:p>
           <a:p>
             <a:pPr lvl="1"/>
             <a:r>
               <a:rPr lang="en-US" dirty="0"/>
-              <a:t>Researched motors for most optimal option for  vehicle</a:t>
+              <a:t>Tested motors and motor controller for performance </a:t>
+            </a:r>
+          </a:p>
+          <a:p>
+            <a:pPr lvl="1"/>
+            <a:r>
+              <a:rPr lang="en-US" dirty="0"/>
+              <a:t>Determined hardware power requirements for future battery/power supply selection</a:t>
             </a:r>
           </a:p>
           <a:p>
@@ -3426,20 +3442,15 @@
             <a:pPr lvl="1"/>
             <a:r>
               <a:rPr lang="en-US" dirty="0"/>
-              <a:t>Select and Order motors</a:t>
+              <a:t>Select replacement motors/controller if needed </a:t>
             </a:r>
           </a:p>
           <a:p>
             <a:pPr lvl="1"/>
             <a:r>
               <a:rPr lang="en-US" dirty="0"/>
-              <a:t>Write code to integrate Ultrasonic Sensor onto </a:t>
-            </a:r>
-            <a:r>
-              <a:rPr lang="en-US" dirty="0" err="1"/>
-              <a:t>RaspberryPi</a:t>
-            </a:r>
-            <a:endParaRPr lang="en-US" dirty="0"/>
+              <a:t>Narrow down battery/power supply options </a:t>
+            </a:r>
           </a:p>
           <a:p>
             <a:r>
@@ -3451,11 +3462,8 @@
             <a:pPr lvl="1"/>
             <a:r>
               <a:rPr lang="en-US" dirty="0"/>
-              <a:t>6 hours.</a:t>
-            </a:r>
-          </a:p>
-          <a:p>
-            <a:endParaRPr lang="en-US" dirty="0"/>
+              <a:t>7 hours.</a:t>
+            </a:r>
           </a:p>
         </p:txBody>
       </p:sp>
@@ -3463,6 +3471,670 @@
     <p:extLst>
       <p:ext uri="{BB962C8B-B14F-4D97-AF65-F5344CB8AC3E}">
         <p14:creationId xmlns:p14="http://schemas.microsoft.com/office/powerpoint/2010/main" val="3566922106"/>
+      </p:ext>
+    </p:extLst>
+  </p:cSld>
+  <p:clrMapOvr>
+    <a:masterClrMapping/>
+  </p:clrMapOvr>
+</p:sld>
+</file>
+
+<file path=ppt/slides/slide2.xml><?xml version="1.0" encoding="utf-8"?>
+<p:sld xmlns:a="http://schemas.openxmlformats.org/drawingml/2006/main" xmlns:r="http://schemas.openxmlformats.org/officeDocument/2006/relationships" xmlns:p="http://schemas.openxmlformats.org/presentationml/2006/main">
+  <p:cSld>
+    <p:bg>
+      <p:bgPr>
+        <a:solidFill>
+          <a:schemeClr val="bg1"/>
+        </a:solidFill>
+        <a:effectLst/>
+      </p:bgPr>
+    </p:bg>
+    <p:spTree>
+      <p:nvGrpSpPr>
+        <p:cNvPr id="1" name=""/>
+        <p:cNvGrpSpPr/>
+        <p:nvPr/>
+      </p:nvGrpSpPr>
+      <p:grpSpPr>
+        <a:xfrm>
+          <a:off x="0" y="0"/>
+          <a:ext cx="0" cy="0"/>
+          <a:chOff x="0" y="0"/>
+          <a:chExt cx="0" cy="0"/>
+        </a:xfrm>
+      </p:grpSpPr>
+      <p:sp useBgFill="1">
+        <p:nvSpPr>
+          <p:cNvPr id="17" name="Rectangle 16">
+            <a:extLst>
+              <a:ext uri="{FF2B5EF4-FFF2-40B4-BE49-F238E27FC236}">
+                <a16:creationId xmlns:a16="http://schemas.microsoft.com/office/drawing/2014/main" id="{5EBC18B6-E5C3-4AD1-97A4-E6A3477A0BB9}"/>
+              </a:ext>
+              <a:ext uri="{C183D7F6-B498-43B3-948B-1728B52AA6E4}">
+                <adec:decorative xmlns:adec="http://schemas.microsoft.com/office/drawing/2017/decorative" val="1"/>
+              </a:ext>
+            </a:extLst>
+          </p:cNvPr>
+          <p:cNvSpPr>
+            <a:spLocks noGrp="1" noRot="1" noChangeAspect="1" noMove="1" noResize="1" noEditPoints="1" noAdjustHandles="1" noChangeArrowheads="1" noChangeShapeType="1" noTextEdit="1"/>
+          </p:cNvSpPr>
+          <p:nvPr>
+            <p:extLst>
+              <p:ext uri="{386F3935-93C4-4BCD-93E2-E3B085C9AB24}">
+                <p16:designElem xmlns:p16="http://schemas.microsoft.com/office/powerpoint/2015/main" val="1"/>
+              </p:ext>
+            </p:extLst>
+          </p:nvPr>
+        </p:nvSpPr>
+        <p:spPr>
+          <a:xfrm>
+            <a:off x="0" y="0"/>
+            <a:ext cx="12192000" cy="6858000"/>
+          </a:xfrm>
+          <a:prstGeom prst="rect">
+            <a:avLst/>
+          </a:prstGeom>
+          <a:ln>
+            <a:noFill/>
+          </a:ln>
+        </p:spPr>
+        <p:style>
+          <a:lnRef idx="2">
+            <a:schemeClr val="accent1">
+              <a:shade val="50000"/>
+            </a:schemeClr>
+          </a:lnRef>
+          <a:fillRef idx="1">
+            <a:schemeClr val="accent1"/>
+          </a:fillRef>
+          <a:effectRef idx="0">
+            <a:schemeClr val="accent1"/>
+          </a:effectRef>
+          <a:fontRef idx="minor">
+            <a:schemeClr val="lt1"/>
+          </a:fontRef>
+        </p:style>
+        <p:txBody>
+          <a:bodyPr rtlCol="0" anchor="ctr"/>
+          <a:lstStyle/>
+          <a:p>
+            <a:pPr algn="ctr"/>
+            <a:endParaRPr lang="en-US"/>
+          </a:p>
+        </p:txBody>
+      </p:sp>
+      <p:sp>
+        <p:nvSpPr>
+          <p:cNvPr id="2" name="Title 1">
+            <a:extLst>
+              <a:ext uri="{FF2B5EF4-FFF2-40B4-BE49-F238E27FC236}">
+                <a16:creationId xmlns:a16="http://schemas.microsoft.com/office/drawing/2014/main" id="{D8685021-91A2-D085-D313-8849798D63DD}"/>
+              </a:ext>
+            </a:extLst>
+          </p:cNvPr>
+          <p:cNvSpPr>
+            <a:spLocks noGrp="1"/>
+          </p:cNvSpPr>
+          <p:nvPr>
+            <p:ph type="title"/>
+          </p:nvPr>
+        </p:nvSpPr>
+        <p:spPr>
+          <a:xfrm>
+            <a:off x="612648" y="1078992"/>
+            <a:ext cx="6272784" cy="1545336"/>
+          </a:xfrm>
+        </p:spPr>
+        <p:txBody>
+          <a:bodyPr vert="horz" lIns="91440" tIns="45720" rIns="91440" bIns="45720" rtlCol="0" anchor="b">
+            <a:normAutofit/>
+          </a:bodyPr>
+          <a:lstStyle/>
+          <a:p>
+            <a:r>
+              <a:rPr lang="en-US" sz="5200" kern="1200">
+                <a:solidFill>
+                  <a:schemeClr val="tx1"/>
+                </a:solidFill>
+                <a:latin typeface="+mj-lt"/>
+                <a:ea typeface="+mj-ea"/>
+                <a:cs typeface="+mj-cs"/>
+              </a:rPr>
+              <a:t>Ultrasonic Sensor Testing</a:t>
+            </a:r>
+          </a:p>
+        </p:txBody>
+      </p:sp>
+      <p:sp>
+        <p:nvSpPr>
+          <p:cNvPr id="19" name="Rectangle 18">
+            <a:extLst>
+              <a:ext uri="{FF2B5EF4-FFF2-40B4-BE49-F238E27FC236}">
+                <a16:creationId xmlns:a16="http://schemas.microsoft.com/office/drawing/2014/main" id="{136A4AB6-B72B-4CC6-ADCF-BE807B6C3D71}"/>
+              </a:ext>
+              <a:ext uri="{C183D7F6-B498-43B3-948B-1728B52AA6E4}">
+                <adec:decorative xmlns:adec="http://schemas.microsoft.com/office/drawing/2017/decorative" val="1"/>
+              </a:ext>
+            </a:extLst>
+          </p:cNvPr>
+          <p:cNvSpPr>
+            <a:spLocks noGrp="1" noRot="1" noChangeAspect="1" noMove="1" noResize="1" noEditPoints="1" noAdjustHandles="1" noChangeArrowheads="1" noChangeShapeType="1" noTextEdit="1"/>
+          </p:cNvSpPr>
+          <p:nvPr>
+            <p:extLst>
+              <p:ext uri="{386F3935-93C4-4BCD-93E2-E3B085C9AB24}">
+                <p16:designElem xmlns:p16="http://schemas.microsoft.com/office/powerpoint/2015/main" val="1"/>
+              </p:ext>
+            </p:extLst>
+          </p:nvPr>
+        </p:nvSpPr>
+        <p:spPr>
+          <a:xfrm rot="5400000">
+            <a:off x="850392" y="363389"/>
+            <a:ext cx="73152" cy="548640"/>
+          </a:xfrm>
+          <a:prstGeom prst="rect">
+            <a:avLst/>
+          </a:prstGeom>
+          <a:solidFill>
+            <a:schemeClr val="accent2"/>
+          </a:solidFill>
+          <a:ln>
+            <a:noFill/>
+          </a:ln>
+        </p:spPr>
+        <p:style>
+          <a:lnRef idx="2">
+            <a:schemeClr val="accent1">
+              <a:shade val="50000"/>
+            </a:schemeClr>
+          </a:lnRef>
+          <a:fillRef idx="1">
+            <a:schemeClr val="accent1"/>
+          </a:fillRef>
+          <a:effectRef idx="0">
+            <a:schemeClr val="accent1"/>
+          </a:effectRef>
+          <a:fontRef idx="minor">
+            <a:schemeClr val="lt1"/>
+          </a:fontRef>
+        </p:style>
+        <p:txBody>
+          <a:bodyPr rtlCol="0" anchor="ctr"/>
+          <a:lstStyle/>
+          <a:p>
+            <a:pPr marL="0" marR="0" lvl="0" indent="0" algn="ctr" defTabSz="914400" rtl="0" eaLnBrk="1" fontAlgn="auto" latinLnBrk="0" hangingPunct="1">
+              <a:lnSpc>
+                <a:spcPct val="100000"/>
+              </a:lnSpc>
+              <a:spcBef>
+                <a:spcPts val="0"/>
+              </a:spcBef>
+              <a:spcAft>
+                <a:spcPts val="0"/>
+              </a:spcAft>
+              <a:buClrTx/>
+              <a:buSzTx/>
+              <a:buFontTx/>
+              <a:buNone/>
+              <a:tabLst/>
+              <a:defRPr/>
+            </a:pPr>
+            <a:endParaRPr kumimoji="0" lang="en-US" sz="1800" b="0" i="0" u="none" strike="noStrike" kern="1200" cap="none" spc="0" normalizeH="0" baseline="0" noProof="0">
+              <a:ln>
+                <a:noFill/>
+              </a:ln>
+              <a:solidFill>
+                <a:prstClr val="white"/>
+              </a:solidFill>
+              <a:effectLst/>
+              <a:uLnTx/>
+              <a:uFillTx/>
+              <a:latin typeface="Calibri" panose="020F0502020204030204"/>
+              <a:ea typeface="+mn-ea"/>
+              <a:cs typeface="+mn-cs"/>
+            </a:endParaRPr>
+          </a:p>
+        </p:txBody>
+      </p:sp>
+      <p:pic>
+        <p:nvPicPr>
+          <p:cNvPr id="8" name="Content Placeholder 6">
+            <a:extLst>
+              <a:ext uri="{FF2B5EF4-FFF2-40B4-BE49-F238E27FC236}">
+                <a16:creationId xmlns:a16="http://schemas.microsoft.com/office/drawing/2014/main" id="{E9B4CCDE-9DCA-D8A6-15AB-9601CC5C06DE}"/>
+              </a:ext>
+            </a:extLst>
+          </p:cNvPr>
+          <p:cNvPicPr>
+            <a:picLocks noChangeAspect="1"/>
+          </p:cNvPicPr>
+          <p:nvPr/>
+        </p:nvPicPr>
+        <p:blipFill>
+          <a:blip r:embed="rId2"/>
+          <a:srcRect b="15770"/>
+          <a:stretch>
+            <a:fillRect/>
+          </a:stretch>
+        </p:blipFill>
+        <p:spPr>
+          <a:xfrm>
+            <a:off x="7684008" y="2262050"/>
+            <a:ext cx="4507992" cy="2240280"/>
+          </a:xfrm>
+          <a:prstGeom prst="rect">
+            <a:avLst/>
+          </a:prstGeom>
+        </p:spPr>
+      </p:pic>
+      <p:sp>
+        <p:nvSpPr>
+          <p:cNvPr id="21" name="Rectangle 20">
+            <a:extLst>
+              <a:ext uri="{FF2B5EF4-FFF2-40B4-BE49-F238E27FC236}">
+                <a16:creationId xmlns:a16="http://schemas.microsoft.com/office/drawing/2014/main" id="{B35D540D-9486-4236-952A-F72DC52D79BF}"/>
+              </a:ext>
+              <a:ext uri="{C183D7F6-B498-43B3-948B-1728B52AA6E4}">
+                <adec:decorative xmlns:adec="http://schemas.microsoft.com/office/drawing/2017/decorative" val="1"/>
+              </a:ext>
+            </a:extLst>
+          </p:cNvPr>
+          <p:cNvSpPr>
+            <a:spLocks noGrp="1" noRot="1" noChangeAspect="1" noMove="1" noResize="1" noEditPoints="1" noAdjustHandles="1" noChangeArrowheads="1" noChangeShapeType="1" noTextEdit="1"/>
+          </p:cNvSpPr>
+          <p:nvPr>
+            <p:extLst>
+              <p:ext uri="{386F3935-93C4-4BCD-93E2-E3B085C9AB24}">
+                <p16:designElem xmlns:p16="http://schemas.microsoft.com/office/powerpoint/2015/main" val="1"/>
+              </p:ext>
+            </p:extLst>
+          </p:nvPr>
+        </p:nvSpPr>
+        <p:spPr>
+          <a:xfrm>
+            <a:off x="621792" y="2935541"/>
+            <a:ext cx="6217920" cy="18288"/>
+          </a:xfrm>
+          <a:prstGeom prst="rect">
+            <a:avLst/>
+          </a:prstGeom>
+          <a:solidFill>
+            <a:srgbClr val="D5D5D5"/>
+          </a:solidFill>
+          <a:ln w="3175">
+            <a:noFill/>
+          </a:ln>
+          <a:effectLst/>
+        </p:spPr>
+        <p:style>
+          <a:lnRef idx="2">
+            <a:schemeClr val="accent1">
+              <a:shade val="50000"/>
+            </a:schemeClr>
+          </a:lnRef>
+          <a:fillRef idx="1">
+            <a:schemeClr val="accent1"/>
+          </a:fillRef>
+          <a:effectRef idx="0">
+            <a:schemeClr val="accent1"/>
+          </a:effectRef>
+          <a:fontRef idx="minor">
+            <a:schemeClr val="lt1"/>
+          </a:fontRef>
+        </p:style>
+        <p:txBody>
+          <a:bodyPr rtlCol="0" anchor="ctr"/>
+          <a:lstStyle/>
+          <a:p>
+            <a:pPr marL="0" marR="0" lvl="0" indent="0" algn="ctr" defTabSz="914400" rtl="0" eaLnBrk="1" fontAlgn="auto" latinLnBrk="0" hangingPunct="1">
+              <a:lnSpc>
+                <a:spcPct val="100000"/>
+              </a:lnSpc>
+              <a:spcBef>
+                <a:spcPts val="0"/>
+              </a:spcBef>
+              <a:spcAft>
+                <a:spcPts val="0"/>
+              </a:spcAft>
+              <a:buClrTx/>
+              <a:buSzTx/>
+              <a:buFontTx/>
+              <a:buNone/>
+              <a:tabLst/>
+              <a:defRPr/>
+            </a:pPr>
+            <a:endParaRPr kumimoji="0" lang="en-US" sz="1800" b="0" i="0" u="none" strike="noStrike" kern="1200" cap="none" spc="0" normalizeH="0" baseline="0" noProof="0">
+              <a:ln>
+                <a:noFill/>
+              </a:ln>
+              <a:solidFill>
+                <a:prstClr val="white"/>
+              </a:solidFill>
+              <a:effectLst/>
+              <a:uLnTx/>
+              <a:uFillTx/>
+              <a:latin typeface="Calibri" panose="020F0502020204030204"/>
+              <a:ea typeface="+mn-ea"/>
+              <a:cs typeface="+mn-cs"/>
+            </a:endParaRPr>
+          </a:p>
+        </p:txBody>
+      </p:sp>
+      <p:sp>
+        <p:nvSpPr>
+          <p:cNvPr id="14" name="Content Placeholder 13">
+            <a:extLst>
+              <a:ext uri="{FF2B5EF4-FFF2-40B4-BE49-F238E27FC236}">
+                <a16:creationId xmlns:a16="http://schemas.microsoft.com/office/drawing/2014/main" id="{C2DB5B6C-3CFB-A33B-9C34-E24E7E974FB3}"/>
+              </a:ext>
+            </a:extLst>
+          </p:cNvPr>
+          <p:cNvSpPr>
+            <a:spLocks noGrp="1"/>
+          </p:cNvSpPr>
+          <p:nvPr>
+            <p:ph sz="half" idx="1"/>
+          </p:nvPr>
+        </p:nvSpPr>
+        <p:spPr>
+          <a:xfrm>
+            <a:off x="612648" y="3355848"/>
+            <a:ext cx="6272784" cy="2825496"/>
+          </a:xfrm>
+        </p:spPr>
+        <p:txBody>
+          <a:bodyPr vert="horz" lIns="91440" tIns="45720" rIns="91440" bIns="45720" rtlCol="0">
+            <a:normAutofit/>
+          </a:bodyPr>
+          <a:lstStyle/>
+          <a:p>
+            <a:r>
+              <a:rPr lang="en-US" sz="2200" dirty="0"/>
+              <a:t>Additional testing for distance readings and range</a:t>
+            </a:r>
+          </a:p>
+          <a:p>
+            <a:r>
+              <a:rPr lang="en-US" sz="2400" dirty="0"/>
+              <a:t>Finalizing ultrasonic sensor implementation on Raspberry Pi</a:t>
+            </a:r>
+            <a:endParaRPr lang="en-US" sz="2200" dirty="0"/>
+          </a:p>
+        </p:txBody>
+      </p:sp>
+      <p:pic>
+        <p:nvPicPr>
+          <p:cNvPr id="10" name="Content Placeholder 9">
+            <a:extLst>
+              <a:ext uri="{FF2B5EF4-FFF2-40B4-BE49-F238E27FC236}">
+                <a16:creationId xmlns:a16="http://schemas.microsoft.com/office/drawing/2014/main" id="{60DE7792-39F0-1674-6813-4DB0293F4A62}"/>
+              </a:ext>
+            </a:extLst>
+          </p:cNvPr>
+          <p:cNvPicPr>
+            <a:picLocks noGrp="1" noChangeAspect="1"/>
+          </p:cNvPicPr>
+          <p:nvPr>
+            <p:ph sz="half" idx="2"/>
+          </p:nvPr>
+        </p:nvPicPr>
+        <p:blipFill>
+          <a:blip r:embed="rId3"/>
+          <a:srcRect t="1256" b="17609"/>
+          <a:stretch>
+            <a:fillRect/>
+          </a:stretch>
+        </p:blipFill>
+        <p:spPr>
+          <a:xfrm>
+            <a:off x="7684008" y="4595950"/>
+            <a:ext cx="4507992" cy="2240280"/>
+          </a:xfrm>
+          <a:prstGeom prst="rect">
+            <a:avLst/>
+          </a:prstGeom>
+        </p:spPr>
+      </p:pic>
+      <p:pic>
+        <p:nvPicPr>
+          <p:cNvPr id="7" name="Content Placeholder 6">
+            <a:extLst>
+              <a:ext uri="{FF2B5EF4-FFF2-40B4-BE49-F238E27FC236}">
+                <a16:creationId xmlns:a16="http://schemas.microsoft.com/office/drawing/2014/main" id="{4077C99A-E8F4-B5C1-66D0-3A9849345762}"/>
+              </a:ext>
+            </a:extLst>
+          </p:cNvPr>
+          <p:cNvPicPr>
+            <a:picLocks noChangeAspect="1"/>
+          </p:cNvPicPr>
+          <p:nvPr/>
+        </p:nvPicPr>
+        <p:blipFill>
+          <a:blip r:embed="rId4"/>
+          <a:srcRect t="25395" b="1523"/>
+          <a:stretch>
+            <a:fillRect/>
+          </a:stretch>
+        </p:blipFill>
+        <p:spPr>
+          <a:xfrm>
+            <a:off x="7684008" y="21770"/>
+            <a:ext cx="4507992" cy="2146660"/>
+          </a:xfrm>
+          <a:prstGeom prst="rect">
+            <a:avLst/>
+          </a:prstGeom>
+        </p:spPr>
+      </p:pic>
+    </p:spTree>
+    <p:extLst>
+      <p:ext uri="{BB962C8B-B14F-4D97-AF65-F5344CB8AC3E}">
+        <p14:creationId xmlns:p14="http://schemas.microsoft.com/office/powerpoint/2010/main" val="3552499650"/>
+      </p:ext>
+    </p:extLst>
+  </p:cSld>
+  <p:clrMapOvr>
+    <a:masterClrMapping/>
+  </p:clrMapOvr>
+</p:sld>
+</file>
+
+<file path=ppt/slides/slide3.xml><?xml version="1.0" encoding="utf-8"?>
+<p:sld xmlns:a="http://schemas.openxmlformats.org/drawingml/2006/main" xmlns:r="http://schemas.openxmlformats.org/officeDocument/2006/relationships" xmlns:p="http://schemas.openxmlformats.org/presentationml/2006/main">
+  <p:cSld>
+    <p:bg>
+      <p:bgPr>
+        <a:solidFill>
+          <a:schemeClr val="bg1"/>
+        </a:solidFill>
+        <a:effectLst/>
+      </p:bgPr>
+    </p:bg>
+    <p:spTree>
+      <p:nvGrpSpPr>
+        <p:cNvPr id="1" name=""/>
+        <p:cNvGrpSpPr/>
+        <p:nvPr/>
+      </p:nvGrpSpPr>
+      <p:grpSpPr>
+        <a:xfrm>
+          <a:off x="0" y="0"/>
+          <a:ext cx="0" cy="0"/>
+          <a:chOff x="0" y="0"/>
+          <a:chExt cx="0" cy="0"/>
+        </a:xfrm>
+      </p:grpSpPr>
+      <p:sp>
+        <p:nvSpPr>
+          <p:cNvPr id="2" name="Title 1">
+            <a:extLst>
+              <a:ext uri="{FF2B5EF4-FFF2-40B4-BE49-F238E27FC236}">
+                <a16:creationId xmlns:a16="http://schemas.microsoft.com/office/drawing/2014/main" id="{B1CFA3FD-36CD-4450-2E36-5487B2DF4436}"/>
+              </a:ext>
+            </a:extLst>
+          </p:cNvPr>
+          <p:cNvSpPr>
+            <a:spLocks noGrp="1"/>
+          </p:cNvSpPr>
+          <p:nvPr>
+            <p:ph type="title"/>
+          </p:nvPr>
+        </p:nvSpPr>
+        <p:spPr>
+          <a:xfrm>
+            <a:off x="6417733" y="490537"/>
+            <a:ext cx="5291663" cy="1628775"/>
+          </a:xfrm>
+        </p:spPr>
+        <p:txBody>
+          <a:bodyPr anchor="b">
+            <a:normAutofit/>
+          </a:bodyPr>
+          <a:lstStyle/>
+          <a:p>
+            <a:r>
+              <a:rPr lang="en-US" sz="4000" dirty="0"/>
+              <a:t>Motors and Motor Controller</a:t>
+            </a:r>
+          </a:p>
+        </p:txBody>
+      </p:sp>
+      <p:pic>
+        <p:nvPicPr>
+          <p:cNvPr id="5" name="Content Placeholder 4">
+            <a:extLst>
+              <a:ext uri="{FF2B5EF4-FFF2-40B4-BE49-F238E27FC236}">
+                <a16:creationId xmlns:a16="http://schemas.microsoft.com/office/drawing/2014/main" id="{4A4C719A-655E-C6BB-7233-3A21AB105FD5}"/>
+              </a:ext>
+            </a:extLst>
+          </p:cNvPr>
+          <p:cNvPicPr>
+            <a:picLocks noChangeAspect="1"/>
+          </p:cNvPicPr>
+          <p:nvPr/>
+        </p:nvPicPr>
+        <p:blipFill>
+          <a:blip r:embed="rId2"/>
+          <a:srcRect l="4809" r="6281"/>
+          <a:stretch>
+            <a:fillRect/>
+          </a:stretch>
+        </p:blipFill>
+        <p:spPr>
+          <a:xfrm>
+            <a:off x="2" y="1587"/>
+            <a:ext cx="6095999" cy="6856413"/>
+          </a:xfrm>
+          <a:custGeom>
+            <a:avLst/>
+            <a:gdLst/>
+            <a:ahLst/>
+            <a:cxnLst/>
+            <a:rect l="l" t="t" r="r" b="b"/>
+            <a:pathLst>
+              <a:path w="6649908" h="6856413">
+                <a:moveTo>
+                  <a:pt x="0" y="0"/>
+                </a:moveTo>
+                <a:lnTo>
+                  <a:pt x="6559859" y="0"/>
+                </a:lnTo>
+                <a:lnTo>
+                  <a:pt x="6572145" y="79394"/>
+                </a:lnTo>
+                <a:cubicBezTo>
+                  <a:pt x="6857782" y="2230562"/>
+                  <a:pt x="6243159" y="4473353"/>
+                  <a:pt x="6528796" y="6624522"/>
+                </a:cubicBezTo>
+                <a:lnTo>
+                  <a:pt x="6564680" y="6856413"/>
+                </a:lnTo>
+                <a:lnTo>
+                  <a:pt x="0" y="6856413"/>
+                </a:lnTo>
+                <a:close/>
+              </a:path>
+            </a:pathLst>
+          </a:custGeom>
+        </p:spPr>
+      </p:pic>
+      <p:sp>
+        <p:nvSpPr>
+          <p:cNvPr id="9" name="Content Placeholder 8">
+            <a:extLst>
+              <a:ext uri="{FF2B5EF4-FFF2-40B4-BE49-F238E27FC236}">
+                <a16:creationId xmlns:a16="http://schemas.microsoft.com/office/drawing/2014/main" id="{B2A1C60F-8669-8937-5F65-ACBA0471CCCD}"/>
+              </a:ext>
+            </a:extLst>
+          </p:cNvPr>
+          <p:cNvSpPr>
+            <a:spLocks noGrp="1"/>
+          </p:cNvSpPr>
+          <p:nvPr>
+            <p:ph idx="1"/>
+          </p:nvPr>
+        </p:nvSpPr>
+        <p:spPr>
+          <a:xfrm>
+            <a:off x="6417734" y="2614612"/>
+            <a:ext cx="5291663" cy="3752849"/>
+          </a:xfrm>
+        </p:spPr>
+        <p:txBody>
+          <a:bodyPr>
+            <a:normAutofit/>
+          </a:bodyPr>
+          <a:lstStyle/>
+          <a:p>
+            <a:r>
+              <a:rPr lang="en-US" sz="2200" dirty="0"/>
+              <a:t>Ordered motors and motor controller</a:t>
+            </a:r>
+          </a:p>
+          <a:p>
+            <a:pPr lvl="1"/>
+            <a:r>
+              <a:rPr lang="en-US" sz="2200" dirty="0"/>
+              <a:t>L298N Motor Controller</a:t>
+            </a:r>
+          </a:p>
+          <a:p>
+            <a:pPr lvl="1"/>
+            <a:r>
+              <a:rPr lang="en-US" sz="2200" dirty="0"/>
+              <a:t>2x TT-Style DC motors</a:t>
+            </a:r>
+          </a:p>
+          <a:p>
+            <a:r>
+              <a:rPr lang="en-US" sz="2200" dirty="0"/>
+              <a:t>Tested motors/controller for performance</a:t>
+            </a:r>
+          </a:p>
+          <a:p>
+            <a:pPr lvl="0"/>
+            <a:r>
+              <a:rPr lang="en-US" sz="2200" dirty="0"/>
+              <a:t>Identified issues with current components </a:t>
+            </a:r>
+          </a:p>
+          <a:p>
+            <a:pPr lvl="0"/>
+            <a:r>
+              <a:rPr lang="en-US" sz="2200" dirty="0"/>
+              <a:t>Considering replacement motor/controller options</a:t>
+            </a:r>
+          </a:p>
+        </p:txBody>
+      </p:sp>
+    </p:spTree>
+    <p:extLst>
+      <p:ext uri="{BB962C8B-B14F-4D97-AF65-F5344CB8AC3E}">
+        <p14:creationId xmlns:p14="http://schemas.microsoft.com/office/powerpoint/2010/main" val="2069986074"/>
       </p:ext>
     </p:extLst>
   </p:cSld>
